--- a/assets/figures-editable/c1-c2/c2-e06.pptx
+++ b/assets/figures-editable/c1-c2/c2-e06.pptx
@@ -7,7 +7,7 @@
   <p:sldIdLst>
     <p:sldId id="256" r:id="rId7"/>
   </p:sldIdLst>
-  <p:sldSz cx="11948160" cy="7924799" type="screen4x3"/>
+  <p:sldSz cx="12191695" cy="6858000" type="screen4x3"/>
   <p:notesSz cx="6858000" cy="9144000"/>
   <p:defaultTextStyle>
     <a:defPPr>
@@ -3098,14 +3098,14 @@
       <p:grpSpPr/>
       <p:sp>
         <p:nvSpPr>
-          <p:cNvPr id="2" name="text1" descr="sci-ppt:C2-E06-001"/>
+          <p:cNvPr id="2" name="C2-E06 text 0" descr="sci-ppt:o000"/>
           <p:cNvSpPr txBox="1"/>
           <p:nvPr/>
         </p:nvSpPr>
         <p:spPr>
           <a:xfrm>
-            <a:off x="316992" y="268224"/>
-            <a:ext cx="11277600" cy="359054"/>
+            <a:off x="274320" y="118872"/>
+            <a:ext cx="11612880" cy="340105"/>
           </a:xfrm>
           <a:prstGeom prst="rect">
             <a:avLst/>
@@ -3114,7 +3114,7 @@
           <a:effectLst/>
         </p:spPr>
         <p:txBody>
-          <a:bodyPr wrap="none" lIns="27432" rIns="27432" tIns="18288" bIns="18288" anchor="ctr">
+          <a:bodyPr wrap="none" lIns="18288" rIns="18288" tIns="18288" bIns="18288" anchor="t">
             <a:spAutoFit/>
           </a:bodyPr>
           <a:lstStyle/>
@@ -3125,34 +3125,31 @@
               </a:spcAft>
             </a:pPr>
             <a:r>
-              <a:rPr sz="1823" b="0" i="0">
+              <a:rPr sz="1900" b="1" i="0">
                 <a:solidFill>
                   <a:srgbClr val="8EDBD4"/>
                 </a:solidFill>
                 <a:latin typeface="Arial"/>
               </a:rPr>
-              <a:t>C2-E06 | Physical-variable diagram</a:t>
-            </a:r>
-          </a:p>
-        </p:txBody>
-      </p:sp>
-      <p:sp>
-        <p:nvSpPr>
-          <p:cNvPr id="3" name="rect2" descr="sci-ppt:C2-E06-002"/>
-          <p:cNvSpPr/>
+              <a:t>C2-E06 · Derived optical-energy balance</a:t>
+            </a:r>
+          </a:p>
+        </p:txBody>
+      </p:sp>
+      <p:cxnSp>
+        <p:nvCxnSpPr>
+          <p:cNvPr id="3" name="C2-E06 line 1" descr="sci-ppt:o001"/>
+          <p:cNvCxnSpPr/>
           <p:nvPr/>
-        </p:nvSpPr>
-        <p:spPr>
-          <a:xfrm>
-            <a:off x="3779520" y="1341120"/>
-            <a:ext cx="3169920" cy="2743200"/>
-          </a:xfrm>
-          <a:prstGeom prst="rect">
+        </p:nvCxnSpPr>
+        <p:spPr>
+          <a:xfrm>
+            <a:off x="914400" y="5029200"/>
+            <a:ext cx="6583679" cy="0"/>
+          </a:xfrm>
+          <a:prstGeom prst="line">
             <a:avLst/>
           </a:prstGeom>
-          <a:solidFill>
-            <a:srgbClr val="213E4B"/>
-          </a:solidFill>
           <a:ln w="19050">
             <a:solidFill>
               <a:srgbClr val="B4C7D2"/>
@@ -3160,96 +3157,83 @@
           </a:ln>
           <a:effectLst/>
         </p:spPr>
-        <p:txBody>
-          <a:bodyPr rtlCol="0" anchor="ctr"/>
-          <a:lstStyle/>
-          <a:p>
-            <a:pPr algn="ctr"/>
-          </a:p>
-        </p:txBody>
-      </p:sp>
+      </p:cxnSp>
       <p:cxnSp>
         <p:nvCxnSpPr>
-          <p:cNvPr id="4" name="arrow3" descr="sci-ppt:C2-E06-003"/>
+          <p:cNvPr id="4" name="C2-E06 line 2" descr="sci-ppt:o002"/>
           <p:cNvCxnSpPr/>
           <p:nvPr/>
         </p:nvCxnSpPr>
         <p:spPr>
           <a:xfrm>
-            <a:off x="1097280" y="2499360"/>
-            <a:ext cx="2560320" cy="0"/>
+            <a:off x="914400" y="1371600"/>
+            <a:ext cx="0" cy="3657600"/>
           </a:xfrm>
           <a:prstGeom prst="line">
             <a:avLst/>
           </a:prstGeom>
-          <a:ln w="25400">
+          <a:ln w="19050">
             <a:solidFill>
-              <a:srgbClr val="F6BC77"/>
+              <a:srgbClr val="B4C7D2"/>
             </a:solidFill>
-            <a:headEnd type="none" w="med" len="med"/>
-            <a:tailEnd type="triangle" w="med" len="med"/>
           </a:ln>
           <a:effectLst/>
         </p:spPr>
       </p:cxnSp>
       <p:cxnSp>
         <p:nvCxnSpPr>
-          <p:cNvPr id="5" name="arrow4" descr="sci-ppt:C2-E06-004"/>
+          <p:cNvPr id="5" name="C2-E06 line 3" descr="sci-ppt:o003"/>
           <p:cNvCxnSpPr/>
           <p:nvPr/>
         </p:nvCxnSpPr>
         <p:spPr>
           <a:xfrm>
-            <a:off x="7010400" y="2499360"/>
-            <a:ext cx="2621280" cy="0"/>
+            <a:off x="850392" y="5029200"/>
+            <a:ext cx="64008" cy="0"/>
           </a:xfrm>
           <a:prstGeom prst="line">
             <a:avLst/>
           </a:prstGeom>
-          <a:ln w="25400">
+          <a:ln w="12700">
             <a:solidFill>
-              <a:srgbClr val="8EDBD4"/>
+              <a:srgbClr val="B4C7D2"/>
             </a:solidFill>
-            <a:headEnd type="none" w="med" len="med"/>
-            <a:tailEnd type="triangle" w="med" len="med"/>
           </a:ln>
           <a:effectLst/>
         </p:spPr>
       </p:cxnSp>
       <p:cxnSp>
         <p:nvCxnSpPr>
-          <p:cNvPr id="6" name="arrow5" descr="sci-ppt:C2-E06-005"/>
+          <p:cNvPr id="6" name="C2-E06 line 4" descr="sci-ppt:o004"/>
           <p:cNvCxnSpPr/>
           <p:nvPr/>
         </p:nvCxnSpPr>
         <p:spPr>
-          <a:xfrm flipH="1" flipV="1">
-            <a:off x="2316480" y="1402080"/>
-            <a:ext cx="1463040" cy="1097280"/>
+          <a:xfrm>
+            <a:off x="914400" y="5029200"/>
+            <a:ext cx="6583679" cy="0"/>
           </a:xfrm>
           <a:prstGeom prst="line">
             <a:avLst/>
           </a:prstGeom>
-          <a:ln w="25400">
+          <a:ln w="7620">
             <a:solidFill>
-              <a:srgbClr val="8EDBD4"/>
+              <a:srgbClr val="2E4756"/>
             </a:solidFill>
-            <a:headEnd type="none" w="med" len="med"/>
-            <a:tailEnd type="triangle" w="med" len="med"/>
           </a:ln>
           <a:effectLst/>
         </p:spPr>
       </p:cxnSp>
       <p:sp>
         <p:nvSpPr>
-          <p:cNvPr id="7" name="text6" descr="sci-ppt:C2-E06-006"/>
+          <p:cNvPr id="7" name="C2-E06 text 5" descr="sci-ppt:o005"/>
           <p:cNvSpPr txBox="1"/>
           <p:nvPr/>
         </p:nvSpPr>
         <p:spPr>
           <a:xfrm>
-            <a:off x="853440" y="2926080"/>
-            <a:ext cx="2804160" cy="359054"/>
+            <a:off x="45720" y="4946904"/>
+            <a:ext cx="777240" cy="208407"/>
           </a:xfrm>
           <a:prstGeom prst="rect">
             <a:avLst/>
@@ -3258,7 +3242,383 @@
           <a:effectLst/>
         </p:spPr>
         <p:txBody>
-          <a:bodyPr wrap="none" lIns="27432" rIns="27432" tIns="18288" bIns="18288" anchor="ctr">
+          <a:bodyPr wrap="none" lIns="18288" rIns="18288" tIns="18288" bIns="18288" anchor="t">
+            <a:spAutoFit/>
+          </a:bodyPr>
+          <a:lstStyle/>
+          <a:p>
+            <a:pPr algn="r">
+              <a:spcAft>
+                <a:spcPts val="0"/>
+              </a:spcAft>
+            </a:pPr>
+            <a:r>
+              <a:rPr sz="1050" b="0" i="0">
+                <a:solidFill>
+                  <a:srgbClr val="B4C7D2"/>
+                </a:solidFill>
+                <a:latin typeface="Arial"/>
+              </a:rPr>
+              <a:t>0</a:t>
+            </a:r>
+          </a:p>
+        </p:txBody>
+      </p:sp>
+      <p:cxnSp>
+        <p:nvCxnSpPr>
+          <p:cNvPr id="8" name="C2-E06 line 6" descr="sci-ppt:o006"/>
+          <p:cNvCxnSpPr/>
+          <p:nvPr/>
+        </p:nvCxnSpPr>
+        <p:spPr>
+          <a:xfrm>
+            <a:off x="850392" y="4197927"/>
+            <a:ext cx="64008" cy="0"/>
+          </a:xfrm>
+          <a:prstGeom prst="line">
+            <a:avLst/>
+          </a:prstGeom>
+          <a:ln w="12700">
+            <a:solidFill>
+              <a:srgbClr val="B4C7D2"/>
+            </a:solidFill>
+          </a:ln>
+          <a:effectLst/>
+        </p:spPr>
+      </p:cxnSp>
+      <p:cxnSp>
+        <p:nvCxnSpPr>
+          <p:cNvPr id="9" name="C2-E06 line 7" descr="sci-ppt:o007"/>
+          <p:cNvCxnSpPr/>
+          <p:nvPr/>
+        </p:nvCxnSpPr>
+        <p:spPr>
+          <a:xfrm>
+            <a:off x="914400" y="4197927"/>
+            <a:ext cx="6583679" cy="0"/>
+          </a:xfrm>
+          <a:prstGeom prst="line">
+            <a:avLst/>
+          </a:prstGeom>
+          <a:ln w="7620">
+            <a:solidFill>
+              <a:srgbClr val="2E4756"/>
+            </a:solidFill>
+          </a:ln>
+          <a:effectLst/>
+        </p:spPr>
+      </p:cxnSp>
+      <p:sp>
+        <p:nvSpPr>
+          <p:cNvPr id="10" name="C2-E06 text 8" descr="sci-ppt:o008"/>
+          <p:cNvSpPr txBox="1"/>
+          <p:nvPr/>
+        </p:nvSpPr>
+        <p:spPr>
+          <a:xfrm>
+            <a:off x="45720" y="4115631"/>
+            <a:ext cx="777240" cy="208407"/>
+          </a:xfrm>
+          <a:prstGeom prst="rect">
+            <a:avLst/>
+          </a:prstGeom>
+          <a:noFill/>
+          <a:effectLst/>
+        </p:spPr>
+        <p:txBody>
+          <a:bodyPr wrap="none" lIns="18288" rIns="18288" tIns="18288" bIns="18288" anchor="t">
+            <a:spAutoFit/>
+          </a:bodyPr>
+          <a:lstStyle/>
+          <a:p>
+            <a:pPr algn="r">
+              <a:spcAft>
+                <a:spcPts val="0"/>
+              </a:spcAft>
+            </a:pPr>
+            <a:r>
+              <a:rPr sz="1050" b="0" i="0">
+                <a:solidFill>
+                  <a:srgbClr val="B4C7D2"/>
+                </a:solidFill>
+                <a:latin typeface="Arial"/>
+              </a:rPr>
+              <a:t>250</a:t>
+            </a:r>
+          </a:p>
+        </p:txBody>
+      </p:sp>
+      <p:cxnSp>
+        <p:nvCxnSpPr>
+          <p:cNvPr id="11" name="C2-E06 line 9" descr="sci-ppt:o009"/>
+          <p:cNvCxnSpPr/>
+          <p:nvPr/>
+        </p:nvCxnSpPr>
+        <p:spPr>
+          <a:xfrm>
+            <a:off x="850392" y="3366654"/>
+            <a:ext cx="64008" cy="0"/>
+          </a:xfrm>
+          <a:prstGeom prst="line">
+            <a:avLst/>
+          </a:prstGeom>
+          <a:ln w="12700">
+            <a:solidFill>
+              <a:srgbClr val="B4C7D2"/>
+            </a:solidFill>
+          </a:ln>
+          <a:effectLst/>
+        </p:spPr>
+      </p:cxnSp>
+      <p:cxnSp>
+        <p:nvCxnSpPr>
+          <p:cNvPr id="12" name="C2-E06 line 10" descr="sci-ppt:o010"/>
+          <p:cNvCxnSpPr/>
+          <p:nvPr/>
+        </p:nvCxnSpPr>
+        <p:spPr>
+          <a:xfrm>
+            <a:off x="914400" y="3366654"/>
+            <a:ext cx="6583679" cy="0"/>
+          </a:xfrm>
+          <a:prstGeom prst="line">
+            <a:avLst/>
+          </a:prstGeom>
+          <a:ln w="7620">
+            <a:solidFill>
+              <a:srgbClr val="2E4756"/>
+            </a:solidFill>
+          </a:ln>
+          <a:effectLst/>
+        </p:spPr>
+      </p:cxnSp>
+      <p:sp>
+        <p:nvSpPr>
+          <p:cNvPr id="13" name="C2-E06 text 11" descr="sci-ppt:o011"/>
+          <p:cNvSpPr txBox="1"/>
+          <p:nvPr/>
+        </p:nvSpPr>
+        <p:spPr>
+          <a:xfrm>
+            <a:off x="45720" y="3284358"/>
+            <a:ext cx="777240" cy="208407"/>
+          </a:xfrm>
+          <a:prstGeom prst="rect">
+            <a:avLst/>
+          </a:prstGeom>
+          <a:noFill/>
+          <a:effectLst/>
+        </p:spPr>
+        <p:txBody>
+          <a:bodyPr wrap="none" lIns="18288" rIns="18288" tIns="18288" bIns="18288" anchor="t">
+            <a:spAutoFit/>
+          </a:bodyPr>
+          <a:lstStyle/>
+          <a:p>
+            <a:pPr algn="r">
+              <a:spcAft>
+                <a:spcPts val="0"/>
+              </a:spcAft>
+            </a:pPr>
+            <a:r>
+              <a:rPr sz="1050" b="0" i="0">
+                <a:solidFill>
+                  <a:srgbClr val="B4C7D2"/>
+                </a:solidFill>
+                <a:latin typeface="Arial"/>
+              </a:rPr>
+              <a:t>500</a:t>
+            </a:r>
+          </a:p>
+        </p:txBody>
+      </p:sp>
+      <p:cxnSp>
+        <p:nvCxnSpPr>
+          <p:cNvPr id="14" name="C2-E06 line 12" descr="sci-ppt:o012"/>
+          <p:cNvCxnSpPr/>
+          <p:nvPr/>
+        </p:nvCxnSpPr>
+        <p:spPr>
+          <a:xfrm>
+            <a:off x="850392" y="2535381"/>
+            <a:ext cx="64008" cy="0"/>
+          </a:xfrm>
+          <a:prstGeom prst="line">
+            <a:avLst/>
+          </a:prstGeom>
+          <a:ln w="12700">
+            <a:solidFill>
+              <a:srgbClr val="B4C7D2"/>
+            </a:solidFill>
+          </a:ln>
+          <a:effectLst/>
+        </p:spPr>
+      </p:cxnSp>
+      <p:cxnSp>
+        <p:nvCxnSpPr>
+          <p:cNvPr id="15" name="C2-E06 line 13" descr="sci-ppt:o013"/>
+          <p:cNvCxnSpPr/>
+          <p:nvPr/>
+        </p:nvCxnSpPr>
+        <p:spPr>
+          <a:xfrm>
+            <a:off x="914400" y="2535381"/>
+            <a:ext cx="6583679" cy="0"/>
+          </a:xfrm>
+          <a:prstGeom prst="line">
+            <a:avLst/>
+          </a:prstGeom>
+          <a:ln w="7620">
+            <a:solidFill>
+              <a:srgbClr val="2E4756"/>
+            </a:solidFill>
+          </a:ln>
+          <a:effectLst/>
+        </p:spPr>
+      </p:cxnSp>
+      <p:sp>
+        <p:nvSpPr>
+          <p:cNvPr id="16" name="C2-E06 text 14" descr="sci-ppt:o014"/>
+          <p:cNvSpPr txBox="1"/>
+          <p:nvPr/>
+        </p:nvSpPr>
+        <p:spPr>
+          <a:xfrm>
+            <a:off x="45720" y="2453085"/>
+            <a:ext cx="777240" cy="208407"/>
+          </a:xfrm>
+          <a:prstGeom prst="rect">
+            <a:avLst/>
+          </a:prstGeom>
+          <a:noFill/>
+          <a:effectLst/>
+        </p:spPr>
+        <p:txBody>
+          <a:bodyPr wrap="none" lIns="18288" rIns="18288" tIns="18288" bIns="18288" anchor="t">
+            <a:spAutoFit/>
+          </a:bodyPr>
+          <a:lstStyle/>
+          <a:p>
+            <a:pPr algn="r">
+              <a:spcAft>
+                <a:spcPts val="0"/>
+              </a:spcAft>
+            </a:pPr>
+            <a:r>
+              <a:rPr sz="1050" b="0" i="0">
+                <a:solidFill>
+                  <a:srgbClr val="B4C7D2"/>
+                </a:solidFill>
+                <a:latin typeface="Arial"/>
+              </a:rPr>
+              <a:t>750</a:t>
+            </a:r>
+          </a:p>
+        </p:txBody>
+      </p:sp>
+      <p:cxnSp>
+        <p:nvCxnSpPr>
+          <p:cNvPr id="17" name="C2-E06 line 15" descr="sci-ppt:o015"/>
+          <p:cNvCxnSpPr/>
+          <p:nvPr/>
+        </p:nvCxnSpPr>
+        <p:spPr>
+          <a:xfrm>
+            <a:off x="850392" y="1704109"/>
+            <a:ext cx="64008" cy="0"/>
+          </a:xfrm>
+          <a:prstGeom prst="line">
+            <a:avLst/>
+          </a:prstGeom>
+          <a:ln w="12700">
+            <a:solidFill>
+              <a:srgbClr val="B4C7D2"/>
+            </a:solidFill>
+          </a:ln>
+          <a:effectLst/>
+        </p:spPr>
+      </p:cxnSp>
+      <p:cxnSp>
+        <p:nvCxnSpPr>
+          <p:cNvPr id="18" name="C2-E06 line 16" descr="sci-ppt:o016"/>
+          <p:cNvCxnSpPr/>
+          <p:nvPr/>
+        </p:nvCxnSpPr>
+        <p:spPr>
+          <a:xfrm>
+            <a:off x="914400" y="1704109"/>
+            <a:ext cx="6583679" cy="0"/>
+          </a:xfrm>
+          <a:prstGeom prst="line">
+            <a:avLst/>
+          </a:prstGeom>
+          <a:ln w="7620">
+            <a:solidFill>
+              <a:srgbClr val="2E4756"/>
+            </a:solidFill>
+          </a:ln>
+          <a:effectLst/>
+        </p:spPr>
+      </p:cxnSp>
+      <p:sp>
+        <p:nvSpPr>
+          <p:cNvPr id="19" name="C2-E06 text 17" descr="sci-ppt:o017"/>
+          <p:cNvSpPr txBox="1"/>
+          <p:nvPr/>
+        </p:nvSpPr>
+        <p:spPr>
+          <a:xfrm>
+            <a:off x="45720" y="1621813"/>
+            <a:ext cx="777240" cy="208407"/>
+          </a:xfrm>
+          <a:prstGeom prst="rect">
+            <a:avLst/>
+          </a:prstGeom>
+          <a:noFill/>
+          <a:effectLst/>
+        </p:spPr>
+        <p:txBody>
+          <a:bodyPr wrap="none" lIns="18288" rIns="18288" tIns="18288" bIns="18288" anchor="t">
+            <a:spAutoFit/>
+          </a:bodyPr>
+          <a:lstStyle/>
+          <a:p>
+            <a:pPr algn="r">
+              <a:spcAft>
+                <a:spcPts val="0"/>
+              </a:spcAft>
+            </a:pPr>
+            <a:r>
+              <a:rPr sz="1050" b="0" i="0">
+                <a:solidFill>
+                  <a:srgbClr val="B4C7D2"/>
+                </a:solidFill>
+                <a:latin typeface="Arial"/>
+              </a:rPr>
+              <a:t>1000</a:t>
+            </a:r>
+          </a:p>
+        </p:txBody>
+      </p:sp>
+      <p:sp>
+        <p:nvSpPr>
+          <p:cNvPr id="20" name="C2-E06 text 18" descr="sci-ppt:o018"/>
+          <p:cNvSpPr txBox="1"/>
+          <p:nvPr/>
+        </p:nvSpPr>
+        <p:spPr>
+          <a:xfrm>
+            <a:off x="365760" y="1024128"/>
+            <a:ext cx="6583680" cy="231648"/>
+          </a:xfrm>
+          <a:prstGeom prst="rect">
+            <a:avLst/>
+          </a:prstGeom>
+          <a:noFill/>
+          <a:effectLst/>
+        </p:spPr>
+        <p:txBody>
+          <a:bodyPr wrap="none" lIns="18288" rIns="18288" tIns="18288" bIns="18288" anchor="t">
             <a:spAutoFit/>
           </a:bodyPr>
           <a:lstStyle/>
@@ -3269,27 +3629,63 @@
               </a:spcAft>
             </a:pPr>
             <a:r>
-              <a:rPr sz="1823" b="0" i="0">
+              <a:rPr sz="1200" b="0" i="0">
                 <a:solidFill>
                   <a:srgbClr val="E7F0F3"/>
                 </a:solidFill>
                 <a:latin typeface="Arial"/>
               </a:rPr>
-              <a:t>Incident light</a:t>
-            </a:r>
-          </a:p>
-        </p:txBody>
-      </p:sp>
-      <p:sp>
-        <p:nvSpPr>
-          <p:cNvPr id="8" name="text7" descr="sci-ppt:C2-E06-007"/>
+              <a:t>energy (nJ)</a:t>
+            </a:r>
+          </a:p>
+        </p:txBody>
+      </p:sp>
+      <p:sp>
+        <p:nvSpPr>
+          <p:cNvPr id="21" name="C2-E06 rect 19" descr="sci-ppt:o019"/>
+          <p:cNvSpPr/>
+          <p:nvPr/>
+        </p:nvSpPr>
+        <p:spPr>
+          <a:xfrm>
+            <a:off x="1098743" y="1704109"/>
+            <a:ext cx="948049" cy="3325090"/>
+          </a:xfrm>
+          <a:prstGeom prst="rect">
+            <a:avLst/>
+          </a:prstGeom>
+          <a:solidFill>
+            <a:srgbClr val="8EDBD4">
+              <a:alpha val="85000"/>
+            </a:srgbClr>
+          </a:solidFill>
+          <a:ln w="12700">
+            <a:solidFill>
+              <a:srgbClr val="8EDBD4">
+                <a:alpha val="85000"/>
+              </a:srgbClr>
+            </a:solidFill>
+          </a:ln>
+          <a:effectLst/>
+        </p:spPr>
+        <p:txBody>
+          <a:bodyPr rtlCol="0" anchor="ctr"/>
+          <a:lstStyle/>
+          <a:p>
+            <a:pPr algn="ctr"/>
+          </a:p>
+        </p:txBody>
+      </p:sp>
+      <p:sp>
+        <p:nvSpPr>
+          <p:cNvPr id="22" name="C2-E06 text 20" descr="sci-ppt:o020"/>
           <p:cNvSpPr txBox="1"/>
           <p:nvPr/>
         </p:nvSpPr>
         <p:spPr>
           <a:xfrm>
-            <a:off x="853440" y="975360"/>
-            <a:ext cx="2804160" cy="340156"/>
+            <a:off x="870143" y="1429789"/>
+            <a:ext cx="1405249" cy="223900"/>
           </a:xfrm>
           <a:prstGeom prst="rect">
             <a:avLst/>
@@ -3298,7 +3694,583 @@
           <a:effectLst/>
         </p:spPr>
         <p:txBody>
-          <a:bodyPr wrap="none" lIns="27432" rIns="27432" tIns="18288" bIns="18288" anchor="ctr">
+          <a:bodyPr wrap="none" lIns="18288" rIns="18288" tIns="18288" bIns="18288" anchor="t">
+            <a:spAutoFit/>
+          </a:bodyPr>
+          <a:lstStyle/>
+          <a:p>
+            <a:pPr algn="ctr">
+              <a:spcAft>
+                <a:spcPts val="0"/>
+              </a:spcAft>
+            </a:pPr>
+            <a:r>
+              <a:rPr sz="1150" b="1" i="0">
+                <a:solidFill>
+                  <a:srgbClr val="E7F0F3"/>
+                </a:solidFill>
+                <a:latin typeface="Arial"/>
+              </a:rPr>
+              <a:t>1000</a:t>
+            </a:r>
+          </a:p>
+        </p:txBody>
+      </p:sp>
+      <p:sp>
+        <p:nvSpPr>
+          <p:cNvPr id="23" name="C2-E06 text 21" descr="sci-ppt:o021"/>
+          <p:cNvSpPr txBox="1"/>
+          <p:nvPr/>
+        </p:nvSpPr>
+        <p:spPr>
+          <a:xfrm>
+            <a:off x="824423" y="5102352"/>
+            <a:ext cx="1496689" cy="216153"/>
+          </a:xfrm>
+          <a:prstGeom prst="rect">
+            <a:avLst/>
+          </a:prstGeom>
+          <a:noFill/>
+          <a:effectLst/>
+        </p:spPr>
+        <p:txBody>
+          <a:bodyPr wrap="none" lIns="18288" rIns="18288" tIns="18288" bIns="18288" anchor="t">
+            <a:spAutoFit/>
+          </a:bodyPr>
+          <a:lstStyle/>
+          <a:p>
+            <a:pPr algn="ctr">
+              <a:spcAft>
+                <a:spcPts val="0"/>
+              </a:spcAft>
+            </a:pPr>
+            <a:r>
+              <a:rPr sz="1100" b="0" i="0">
+                <a:solidFill>
+                  <a:srgbClr val="B4C7D2"/>
+                </a:solidFill>
+                <a:latin typeface="Arial"/>
+              </a:rPr>
+              <a:t>incident E_L</a:t>
+            </a:r>
+          </a:p>
+        </p:txBody>
+      </p:sp>
+      <p:sp>
+        <p:nvSpPr>
+          <p:cNvPr id="24" name="C2-E06 rect 22" descr="sci-ppt:o022"/>
+          <p:cNvSpPr/>
+          <p:nvPr/>
+        </p:nvSpPr>
+        <p:spPr>
+          <a:xfrm>
+            <a:off x="2415479" y="1704109"/>
+            <a:ext cx="948049" cy="2016769"/>
+          </a:xfrm>
+          <a:prstGeom prst="rect">
+            <a:avLst/>
+          </a:prstGeom>
+          <a:solidFill>
+            <a:srgbClr val="F28BA0">
+              <a:alpha val="85000"/>
+            </a:srgbClr>
+          </a:solidFill>
+          <a:ln w="12700">
+            <a:solidFill>
+              <a:srgbClr val="F28BA0">
+                <a:alpha val="85000"/>
+              </a:srgbClr>
+            </a:solidFill>
+          </a:ln>
+          <a:effectLst/>
+        </p:spPr>
+        <p:txBody>
+          <a:bodyPr rtlCol="0" anchor="ctr"/>
+          <a:lstStyle/>
+          <a:p>
+            <a:pPr algn="ctr"/>
+          </a:p>
+        </p:txBody>
+      </p:sp>
+      <p:sp>
+        <p:nvSpPr>
+          <p:cNvPr id="25" name="C2-E06 text 23" descr="sci-ppt:o023"/>
+          <p:cNvSpPr txBox="1"/>
+          <p:nvPr/>
+        </p:nvSpPr>
+        <p:spPr>
+          <a:xfrm>
+            <a:off x="2186879" y="1429789"/>
+            <a:ext cx="1405249" cy="223900"/>
+          </a:xfrm>
+          <a:prstGeom prst="rect">
+            <a:avLst/>
+          </a:prstGeom>
+          <a:noFill/>
+          <a:effectLst/>
+        </p:spPr>
+        <p:txBody>
+          <a:bodyPr wrap="none" lIns="18288" rIns="18288" tIns="18288" bIns="18288" anchor="t">
+            <a:spAutoFit/>
+          </a:bodyPr>
+          <a:lstStyle/>
+          <a:p>
+            <a:pPr algn="ctr">
+              <a:spcAft>
+                <a:spcPts val="0"/>
+              </a:spcAft>
+            </a:pPr>
+            <a:r>
+              <a:rPr sz="1150" b="1" i="0">
+                <a:solidFill>
+                  <a:srgbClr val="E7F0F3"/>
+                </a:solidFill>
+                <a:latin typeface="Arial"/>
+              </a:rPr>
+              <a:t>-607</a:t>
+            </a:r>
+          </a:p>
+        </p:txBody>
+      </p:sp>
+      <p:sp>
+        <p:nvSpPr>
+          <p:cNvPr id="26" name="C2-E06 text 24" descr="sci-ppt:o024"/>
+          <p:cNvSpPr txBox="1"/>
+          <p:nvPr/>
+        </p:nvSpPr>
+        <p:spPr>
+          <a:xfrm>
+            <a:off x="2141159" y="5102352"/>
+            <a:ext cx="1496689" cy="216153"/>
+          </a:xfrm>
+          <a:prstGeom prst="rect">
+            <a:avLst/>
+          </a:prstGeom>
+          <a:noFill/>
+          <a:effectLst/>
+        </p:spPr>
+        <p:txBody>
+          <a:bodyPr wrap="none" lIns="18288" rIns="18288" tIns="18288" bIns="18288" anchor="t">
+            <a:spAutoFit/>
+          </a:bodyPr>
+          <a:lstStyle/>
+          <a:p>
+            <a:pPr algn="ctr">
+              <a:spcAft>
+                <a:spcPts val="0"/>
+              </a:spcAft>
+            </a:pPr>
+            <a:r>
+              <a:rPr sz="1100" b="0" i="0">
+                <a:solidFill>
+                  <a:srgbClr val="B4C7D2"/>
+                </a:solidFill>
+                <a:latin typeface="Arial"/>
+              </a:rPr>
+              <a:t>outside aperture</a:t>
+            </a:r>
+          </a:p>
+        </p:txBody>
+      </p:sp>
+      <p:sp>
+        <p:nvSpPr>
+          <p:cNvPr id="27" name="C2-E06 rect 25" descr="sci-ppt:o025"/>
+          <p:cNvSpPr/>
+          <p:nvPr/>
+        </p:nvSpPr>
+        <p:spPr>
+          <a:xfrm>
+            <a:off x="3732215" y="3720878"/>
+            <a:ext cx="948049" cy="130832"/>
+          </a:xfrm>
+          <a:prstGeom prst="rect">
+            <a:avLst/>
+          </a:prstGeom>
+          <a:solidFill>
+            <a:srgbClr val="7FC8F8">
+              <a:alpha val="85000"/>
+            </a:srgbClr>
+          </a:solidFill>
+          <a:ln w="12700">
+            <a:solidFill>
+              <a:srgbClr val="7FC8F8">
+                <a:alpha val="85000"/>
+              </a:srgbClr>
+            </a:solidFill>
+          </a:ln>
+          <a:effectLst/>
+        </p:spPr>
+        <p:txBody>
+          <a:bodyPr rtlCol="0" anchor="ctr"/>
+          <a:lstStyle/>
+          <a:p>
+            <a:pPr algn="ctr"/>
+          </a:p>
+        </p:txBody>
+      </p:sp>
+      <p:sp>
+        <p:nvSpPr>
+          <p:cNvPr id="28" name="C2-E06 text 26" descr="sci-ppt:o026"/>
+          <p:cNvSpPr txBox="1"/>
+          <p:nvPr/>
+        </p:nvSpPr>
+        <p:spPr>
+          <a:xfrm>
+            <a:off x="3503615" y="3446558"/>
+            <a:ext cx="1405249" cy="223900"/>
+          </a:xfrm>
+          <a:prstGeom prst="rect">
+            <a:avLst/>
+          </a:prstGeom>
+          <a:noFill/>
+          <a:effectLst/>
+        </p:spPr>
+        <p:txBody>
+          <a:bodyPr wrap="none" lIns="18288" rIns="18288" tIns="18288" bIns="18288" anchor="t">
+            <a:spAutoFit/>
+          </a:bodyPr>
+          <a:lstStyle/>
+          <a:p>
+            <a:pPr algn="ctr">
+              <a:spcAft>
+                <a:spcPts val="0"/>
+              </a:spcAft>
+            </a:pPr>
+            <a:r>
+              <a:rPr sz="1150" b="1" i="0">
+                <a:solidFill>
+                  <a:srgbClr val="E7F0F3"/>
+                </a:solidFill>
+                <a:latin typeface="Arial"/>
+              </a:rPr>
+              <a:t>-39</a:t>
+            </a:r>
+          </a:p>
+        </p:txBody>
+      </p:sp>
+      <p:sp>
+        <p:nvSpPr>
+          <p:cNvPr id="29" name="C2-E06 text 27" descr="sci-ppt:o027"/>
+          <p:cNvSpPr txBox="1"/>
+          <p:nvPr/>
+        </p:nvSpPr>
+        <p:spPr>
+          <a:xfrm>
+            <a:off x="3457895" y="5102352"/>
+            <a:ext cx="1496689" cy="216153"/>
+          </a:xfrm>
+          <a:prstGeom prst="rect">
+            <a:avLst/>
+          </a:prstGeom>
+          <a:noFill/>
+          <a:effectLst/>
+        </p:spPr>
+        <p:txBody>
+          <a:bodyPr wrap="none" lIns="18288" rIns="18288" tIns="18288" bIns="18288" anchor="t">
+            <a:spAutoFit/>
+          </a:bodyPr>
+          <a:lstStyle/>
+          <a:p>
+            <a:pPr algn="ctr">
+              <a:spcAft>
+                <a:spcPts val="0"/>
+              </a:spcAft>
+            </a:pPr>
+            <a:r>
+              <a:rPr sz="1100" b="0" i="0">
+                <a:solidFill>
+                  <a:srgbClr val="B4C7D2"/>
+                </a:solidFill>
+                <a:latin typeface="Arial"/>
+              </a:rPr>
+              <a:t>reflected 10 %</a:t>
+            </a:r>
+          </a:p>
+        </p:txBody>
+      </p:sp>
+      <p:sp>
+        <p:nvSpPr>
+          <p:cNvPr id="30" name="C2-E06 rect 28" descr="sci-ppt:o028"/>
+          <p:cNvSpPr/>
+          <p:nvPr/>
+        </p:nvSpPr>
+        <p:spPr>
+          <a:xfrm>
+            <a:off x="5048951" y="3851710"/>
+            <a:ext cx="948049" cy="433174"/>
+          </a:xfrm>
+          <a:prstGeom prst="rect">
+            <a:avLst/>
+          </a:prstGeom>
+          <a:solidFill>
+            <a:srgbClr val="B4A0F0">
+              <a:alpha val="85000"/>
+            </a:srgbClr>
+          </a:solidFill>
+          <a:ln w="12700">
+            <a:solidFill>
+              <a:srgbClr val="B4A0F0">
+                <a:alpha val="85000"/>
+              </a:srgbClr>
+            </a:solidFill>
+          </a:ln>
+          <a:effectLst/>
+        </p:spPr>
+        <p:txBody>
+          <a:bodyPr rtlCol="0" anchor="ctr"/>
+          <a:lstStyle/>
+          <a:p>
+            <a:pPr algn="ctr"/>
+          </a:p>
+        </p:txBody>
+      </p:sp>
+      <p:sp>
+        <p:nvSpPr>
+          <p:cNvPr id="31" name="C2-E06 text 29" descr="sci-ppt:o029"/>
+          <p:cNvSpPr txBox="1"/>
+          <p:nvPr/>
+        </p:nvSpPr>
+        <p:spPr>
+          <a:xfrm>
+            <a:off x="4820351" y="3577390"/>
+            <a:ext cx="1405249" cy="223900"/>
+          </a:xfrm>
+          <a:prstGeom prst="rect">
+            <a:avLst/>
+          </a:prstGeom>
+          <a:noFill/>
+          <a:effectLst/>
+        </p:spPr>
+        <p:txBody>
+          <a:bodyPr wrap="none" lIns="18288" rIns="18288" tIns="18288" bIns="18288" anchor="t">
+            <a:spAutoFit/>
+          </a:bodyPr>
+          <a:lstStyle/>
+          <a:p>
+            <a:pPr algn="ctr">
+              <a:spcAft>
+                <a:spcPts val="0"/>
+              </a:spcAft>
+            </a:pPr>
+            <a:r>
+              <a:rPr sz="1150" b="1" i="0">
+                <a:solidFill>
+                  <a:srgbClr val="E7F0F3"/>
+                </a:solidFill>
+                <a:latin typeface="Arial"/>
+              </a:rPr>
+              <a:t>-130</a:t>
+            </a:r>
+          </a:p>
+        </p:txBody>
+      </p:sp>
+      <p:sp>
+        <p:nvSpPr>
+          <p:cNvPr id="32" name="C2-E06 text 30" descr="sci-ppt:o030"/>
+          <p:cNvSpPr txBox="1"/>
+          <p:nvPr/>
+        </p:nvSpPr>
+        <p:spPr>
+          <a:xfrm>
+            <a:off x="4774631" y="5102352"/>
+            <a:ext cx="1496689" cy="216153"/>
+          </a:xfrm>
+          <a:prstGeom prst="rect">
+            <a:avLst/>
+          </a:prstGeom>
+          <a:noFill/>
+          <a:effectLst/>
+        </p:spPr>
+        <p:txBody>
+          <a:bodyPr wrap="none" lIns="18288" rIns="18288" tIns="18288" bIns="18288" anchor="t">
+            <a:spAutoFit/>
+          </a:bodyPr>
+          <a:lstStyle/>
+          <a:p>
+            <a:pPr algn="ctr">
+              <a:spcAft>
+                <a:spcPts val="0"/>
+              </a:spcAft>
+            </a:pPr>
+            <a:r>
+              <a:rPr sz="1100" b="0" i="0">
+                <a:solidFill>
+                  <a:srgbClr val="B4C7D2"/>
+                </a:solidFill>
+                <a:latin typeface="Arial"/>
+              </a:rPr>
+              <a:t>transmitted</a:t>
+            </a:r>
+          </a:p>
+        </p:txBody>
+      </p:sp>
+      <p:sp>
+        <p:nvSpPr>
+          <p:cNvPr id="33" name="C2-E06 rect 31" descr="sci-ppt:o031"/>
+          <p:cNvSpPr/>
+          <p:nvPr/>
+        </p:nvSpPr>
+        <p:spPr>
+          <a:xfrm>
+            <a:off x="6365687" y="4284884"/>
+            <a:ext cx="948049" cy="744315"/>
+          </a:xfrm>
+          <a:prstGeom prst="rect">
+            <a:avLst/>
+          </a:prstGeom>
+          <a:solidFill>
+            <a:srgbClr val="F2B880">
+              <a:alpha val="85000"/>
+            </a:srgbClr>
+          </a:solidFill>
+          <a:ln w="12700">
+            <a:solidFill>
+              <a:srgbClr val="F2B880">
+                <a:alpha val="85000"/>
+              </a:srgbClr>
+            </a:solidFill>
+          </a:ln>
+          <a:effectLst/>
+        </p:spPr>
+        <p:txBody>
+          <a:bodyPr rtlCol="0" anchor="ctr"/>
+          <a:lstStyle/>
+          <a:p>
+            <a:pPr algn="ctr"/>
+          </a:p>
+        </p:txBody>
+      </p:sp>
+      <p:sp>
+        <p:nvSpPr>
+          <p:cNvPr id="34" name="C2-E06 text 32" descr="sci-ppt:o032"/>
+          <p:cNvSpPr txBox="1"/>
+          <p:nvPr/>
+        </p:nvSpPr>
+        <p:spPr>
+          <a:xfrm>
+            <a:off x="6137087" y="4010564"/>
+            <a:ext cx="1405249" cy="223900"/>
+          </a:xfrm>
+          <a:prstGeom prst="rect">
+            <a:avLst/>
+          </a:prstGeom>
+          <a:noFill/>
+          <a:effectLst/>
+        </p:spPr>
+        <p:txBody>
+          <a:bodyPr wrap="none" lIns="18288" rIns="18288" tIns="18288" bIns="18288" anchor="t">
+            <a:spAutoFit/>
+          </a:bodyPr>
+          <a:lstStyle/>
+          <a:p>
+            <a:pPr algn="ctr">
+              <a:spcAft>
+                <a:spcPts val="0"/>
+              </a:spcAft>
+            </a:pPr>
+            <a:r>
+              <a:rPr sz="1150" b="1" i="0">
+                <a:solidFill>
+                  <a:srgbClr val="E7F0F3"/>
+                </a:solidFill>
+                <a:latin typeface="Arial"/>
+              </a:rPr>
+              <a:t>224</a:t>
+            </a:r>
+          </a:p>
+        </p:txBody>
+      </p:sp>
+      <p:sp>
+        <p:nvSpPr>
+          <p:cNvPr id="35" name="C2-E06 text 33" descr="sci-ppt:o033"/>
+          <p:cNvSpPr txBox="1"/>
+          <p:nvPr/>
+        </p:nvSpPr>
+        <p:spPr>
+          <a:xfrm>
+            <a:off x="6091367" y="5102352"/>
+            <a:ext cx="1496689" cy="216153"/>
+          </a:xfrm>
+          <a:prstGeom prst="rect">
+            <a:avLst/>
+          </a:prstGeom>
+          <a:noFill/>
+          <a:effectLst/>
+        </p:spPr>
+        <p:txBody>
+          <a:bodyPr wrap="none" lIns="18288" rIns="18288" tIns="18288" bIns="18288" anchor="t">
+            <a:spAutoFit/>
+          </a:bodyPr>
+          <a:lstStyle/>
+          <a:p>
+            <a:pPr algn="ctr">
+              <a:spcAft>
+                <a:spcPts val="0"/>
+              </a:spcAft>
+            </a:pPr>
+            <a:r>
+              <a:rPr sz="1100" b="0" i="0">
+                <a:solidFill>
+                  <a:srgbClr val="B4C7D2"/>
+                </a:solidFill>
+                <a:latin typeface="Arial"/>
+              </a:rPr>
+              <a:t>absorbed E_abs</a:t>
+            </a:r>
+          </a:p>
+        </p:txBody>
+      </p:sp>
+      <p:sp>
+        <p:nvSpPr>
+          <p:cNvPr id="36" name="C2-E06 round_rect 34" descr="sci-ppt:o034"/>
+          <p:cNvSpPr/>
+          <p:nvPr/>
+        </p:nvSpPr>
+        <p:spPr>
+          <a:xfrm>
+            <a:off x="7772400" y="1371600"/>
+            <a:ext cx="4069080" cy="3657600"/>
+          </a:xfrm>
+          <a:prstGeom prst="roundRect">
+            <a:avLst/>
+          </a:prstGeom>
+          <a:solidFill>
+            <a:srgbClr val="213E4B"/>
+          </a:solidFill>
+          <a:ln w="20320">
+            <a:solidFill>
+              <a:srgbClr val="8EDBD4"/>
+            </a:solidFill>
+          </a:ln>
+          <a:effectLst/>
+        </p:spPr>
+        <p:txBody>
+          <a:bodyPr rtlCol="0" anchor="ctr"/>
+          <a:lstStyle/>
+          <a:p>
+            <a:pPr algn="ctr"/>
+          </a:p>
+        </p:txBody>
+      </p:sp>
+      <p:sp>
+        <p:nvSpPr>
+          <p:cNvPr id="37" name="C2-E06 text 35" descr="sci-ppt:o035"/>
+          <p:cNvSpPr txBox="1"/>
+          <p:nvPr/>
+        </p:nvSpPr>
+        <p:spPr>
+          <a:xfrm>
+            <a:off x="7882127" y="1426464"/>
+            <a:ext cx="3849624" cy="254889"/>
+          </a:xfrm>
+          <a:prstGeom prst="rect">
+            <a:avLst/>
+          </a:prstGeom>
+          <a:noFill/>
+          <a:effectLst/>
+        </p:spPr>
+        <p:txBody>
+          <a:bodyPr wrap="none" lIns="18288" rIns="18288" tIns="18288" bIns="18288" anchor="t">
             <a:spAutoFit/>
           </a:bodyPr>
           <a:lstStyle/>
@@ -3309,27 +4281,219 @@
               </a:spcAft>
             </a:pPr>
             <a:r>
-              <a:rPr sz="1728" b="0" i="0">
+              <a:rPr sz="1350" b="1" i="0">
+                <a:solidFill>
+                  <a:srgbClr val="8EDBD4"/>
+                </a:solidFill>
+                <a:latin typeface="Arial"/>
+              </a:rPr>
+              <a:t>Each factor acts once</a:t>
+            </a:r>
+          </a:p>
+        </p:txBody>
+      </p:sp>
+      <p:sp>
+        <p:nvSpPr>
+          <p:cNvPr id="38" name="C2-E06 text 36" descr="sci-ppt:o036"/>
+          <p:cNvSpPr txBox="1"/>
+          <p:nvPr/>
+        </p:nvSpPr>
+        <p:spPr>
+          <a:xfrm>
+            <a:off x="7909560" y="1828800"/>
+            <a:ext cx="3840480" cy="239395"/>
+          </a:xfrm>
+          <a:prstGeom prst="rect">
+            <a:avLst/>
+          </a:prstGeom>
+          <a:noFill/>
+          <a:effectLst/>
+        </p:spPr>
+        <p:txBody>
+          <a:bodyPr wrap="none" lIns="18288" rIns="18288" tIns="18288" bIns="18288" anchor="t">
+            <a:spAutoFit/>
+          </a:bodyPr>
+          <a:lstStyle/>
+          <a:p>
+            <a:pPr algn="l">
+              <a:spcAft>
+                <a:spcPts val="0"/>
+              </a:spcAft>
+            </a:pPr>
+            <a:r>
+              <a:rPr sz="1250" b="1" i="0">
+                <a:solidFill>
+                  <a:srgbClr val="8EDBD4"/>
+                </a:solidFill>
+                <a:latin typeface="Arial"/>
+              </a:rPr>
+              <a:t>f_geo = 1 − e^(−2(10/20)²) = 0.3935</a:t>
+            </a:r>
+          </a:p>
+        </p:txBody>
+      </p:sp>
+      <p:sp>
+        <p:nvSpPr>
+          <p:cNvPr id="39" name="C2-E06 text 37" descr="sci-ppt:o037"/>
+          <p:cNvSpPr txBox="1"/>
+          <p:nvPr/>
+        </p:nvSpPr>
+        <p:spPr>
+          <a:xfrm>
+            <a:off x="7909560" y="2331720"/>
+            <a:ext cx="3840480" cy="239395"/>
+          </a:xfrm>
+          <a:prstGeom prst="rect">
+            <a:avLst/>
+          </a:prstGeom>
+          <a:noFill/>
+          <a:effectLst/>
+        </p:spPr>
+        <p:txBody>
+          <a:bodyPr wrap="none" lIns="18288" rIns="18288" tIns="18288" bIns="18288" anchor="t">
+            <a:spAutoFit/>
+          </a:bodyPr>
+          <a:lstStyle/>
+          <a:p>
+            <a:pPr algn="l">
+              <a:spcAft>
+                <a:spcPts val="0"/>
+              </a:spcAft>
+            </a:pPr>
+            <a:r>
+              <a:rPr sz="1250" b="1" i="0">
+                <a:solidFill>
+                  <a:srgbClr val="7FC8F8"/>
+                </a:solidFill>
+                <a:latin typeface="Arial"/>
+              </a:rPr>
+              <a:t>A_λ = (1 − 0.10)(1 − e^(−1)) = 0.5689</a:t>
+            </a:r>
+          </a:p>
+        </p:txBody>
+      </p:sp>
+      <p:sp>
+        <p:nvSpPr>
+          <p:cNvPr id="40" name="C2-E06 text 38" descr="sci-ppt:o038"/>
+          <p:cNvSpPr txBox="1"/>
+          <p:nvPr/>
+        </p:nvSpPr>
+        <p:spPr>
+          <a:xfrm>
+            <a:off x="7909560" y="2834640"/>
+            <a:ext cx="3840480" cy="247142"/>
+          </a:xfrm>
+          <a:prstGeom prst="rect">
+            <a:avLst/>
+          </a:prstGeom>
+          <a:noFill/>
+          <a:effectLst/>
+        </p:spPr>
+        <p:txBody>
+          <a:bodyPr wrap="none" lIns="18288" rIns="18288" tIns="18288" bIns="18288" anchor="t">
+            <a:spAutoFit/>
+          </a:bodyPr>
+          <a:lstStyle/>
+          <a:p>
+            <a:pPr algn="l">
+              <a:spcAft>
+                <a:spcPts val="0"/>
+              </a:spcAft>
+            </a:pPr>
+            <a:r>
+              <a:rPr sz="1300" b="1" i="0">
+                <a:solidFill>
+                  <a:srgbClr val="F2B880"/>
+                </a:solidFill>
+                <a:latin typeface="Arial"/>
+              </a:rPr>
+              <a:t>E_abs = f_geo A_λ E_L = 223.8 nJ</a:t>
+            </a:r>
+          </a:p>
+        </p:txBody>
+      </p:sp>
+      <p:sp>
+        <p:nvSpPr>
+          <p:cNvPr id="41" name="C2-E06 text 39" descr="sci-ppt:o039"/>
+          <p:cNvSpPr txBox="1"/>
+          <p:nvPr/>
+        </p:nvSpPr>
+        <p:spPr>
+          <a:xfrm>
+            <a:off x="7909560" y="3474720"/>
+            <a:ext cx="3840480" cy="603504"/>
+          </a:xfrm>
+          <a:prstGeom prst="rect">
+            <a:avLst/>
+          </a:prstGeom>
+          <a:noFill/>
+          <a:effectLst/>
+        </p:spPr>
+        <p:txBody>
+          <a:bodyPr wrap="none" lIns="18288" rIns="18288" tIns="18288" bIns="18288" anchor="t">
+            <a:spAutoFit/>
+          </a:bodyPr>
+          <a:lstStyle/>
+          <a:p>
+            <a:pPr algn="l">
+              <a:spcAft>
+                <a:spcPts val="0"/>
+              </a:spcAft>
+            </a:pPr>
+            <a:r>
+              <a:rPr sz="1200" b="0" i="0">
                 <a:solidFill>
                   <a:srgbClr val="E7F0F3"/>
                 </a:solidFill>
                 <a:latin typeface="Arial"/>
               </a:rPr>
-              <a:t>Reflection</a:t>
-            </a:r>
-          </a:p>
-        </p:txBody>
-      </p:sp>
-      <p:sp>
-        <p:nvSpPr>
-          <p:cNvPr id="9" name="text8" descr="sci-ppt:C2-E06-008"/>
+              <a:t>Interception, front-face reflection and</a:t>
+            </a:r>
+          </a:p>
+          <a:p>
+            <a:pPr algn="l">
+              <a:spcAft>
+                <a:spcPts val="0"/>
+              </a:spcAft>
+            </a:pPr>
+            <a:r>
+              <a:rPr sz="1200" b="0" i="0">
+                <a:solidFill>
+                  <a:srgbClr val="E7F0F3"/>
+                </a:solidFill>
+                <a:latin typeface="Arial"/>
+              </a:rPr>
+              <a:t>internal absorption are separate, multiplied</a:t>
+            </a:r>
+          </a:p>
+          <a:p>
+            <a:pPr algn="l">
+              <a:spcAft>
+                <a:spcPts val="0"/>
+              </a:spcAft>
+            </a:pPr>
+            <a:r>
+              <a:rPr sz="1200" b="0" i="0">
+                <a:solidFill>
+                  <a:srgbClr val="E7F0F3"/>
+                </a:solidFill>
+                <a:latin typeface="Arial"/>
+              </a:rPr>
+              <a:t>losses; none is counted twice.</a:t>
+            </a:r>
+          </a:p>
+        </p:txBody>
+      </p:sp>
+      <p:sp>
+        <p:nvSpPr>
+          <p:cNvPr id="42" name="C2-E06 text 40" descr="sci-ppt:o040"/>
           <p:cNvSpPr txBox="1"/>
           <p:nvPr/>
         </p:nvSpPr>
         <p:spPr>
           <a:xfrm>
-            <a:off x="4084320" y="3048000"/>
-            <a:ext cx="3048000" cy="359054"/>
+            <a:off x="914400" y="5733288"/>
+            <a:ext cx="10972800" cy="239395"/>
           </a:xfrm>
           <a:prstGeom prst="rect">
             <a:avLst/>
@@ -3338,7 +4502,7 @@
           <a:effectLst/>
         </p:spPr>
         <p:txBody>
-          <a:bodyPr wrap="none" lIns="27432" rIns="27432" tIns="18288" bIns="18288" anchor="ctr">
+          <a:bodyPr wrap="none" lIns="18288" rIns="18288" tIns="18288" bIns="18288" anchor="t">
             <a:spAutoFit/>
           </a:bodyPr>
           <a:lstStyle/>
@@ -3349,27 +4513,27 @@
               </a:spcAft>
             </a:pPr>
             <a:r>
-              <a:rPr sz="1823" b="0" i="0">
+              <a:rPr sz="1250" b="0" i="0">
                 <a:solidFill>
-                  <a:srgbClr val="E7F0F3"/>
+                  <a:srgbClr val="B4C7D2"/>
                 </a:solidFill>
                 <a:latin typeface="Arial"/>
               </a:rPr>
-              <a:t>Absorber: Q_abs</a:t>
-            </a:r>
-          </a:p>
-        </p:txBody>
-      </p:sp>
-      <p:sp>
-        <p:nvSpPr>
-          <p:cNvPr id="10" name="text9" descr="sci-ppt:C2-E06-009"/>
+              <a:t>Energy accounting for E_L = 1 µJ, aperture 10 µm, beam radius 20 µm, μₐ hₐ = 1, R_λ = 0.10 (declared inputs).</a:t>
+            </a:r>
+          </a:p>
+        </p:txBody>
+      </p:sp>
+      <p:sp>
+        <p:nvSpPr>
+          <p:cNvPr id="43" name="C2-E06 text 41" descr="sci-ppt:o041"/>
           <p:cNvSpPr txBox="1"/>
           <p:nvPr/>
         </p:nvSpPr>
         <p:spPr>
           <a:xfrm>
-            <a:off x="7315200" y="2926080"/>
-            <a:ext cx="3657600" cy="359054"/>
+            <a:off x="320040" y="6510528"/>
+            <a:ext cx="11521440" cy="200660"/>
           </a:xfrm>
           <a:prstGeom prst="rect">
             <a:avLst/>
@@ -3378,7 +4542,7 @@
           <a:effectLst/>
         </p:spPr>
         <p:txBody>
-          <a:bodyPr wrap="none" lIns="27432" rIns="27432" tIns="18288" bIns="18288" anchor="ctr">
+          <a:bodyPr wrap="none" lIns="18288" rIns="18288" tIns="18288" bIns="18288" anchor="t">
             <a:spAutoFit/>
           </a:bodyPr>
           <a:lstStyle/>
@@ -3389,477 +4553,13 @@
               </a:spcAft>
             </a:pPr>
             <a:r>
-              <a:rPr sz="1823" b="0" i="0">
-                <a:solidFill>
-                  <a:srgbClr val="E7F0F3"/>
-                </a:solidFill>
-                <a:latin typeface="Arial"/>
-              </a:rPr>
-              <a:t>Transmitted light</a:t>
-            </a:r>
-          </a:p>
-        </p:txBody>
-      </p:sp>
-      <p:cxnSp>
-        <p:nvCxnSpPr>
-          <p:cNvPr id="11" name="arrow10" descr="sci-ppt:C2-E06-010"/>
-          <p:cNvCxnSpPr/>
-          <p:nvPr/>
-        </p:nvCxnSpPr>
-        <p:spPr>
-          <a:xfrm>
-            <a:off x="4023360" y="3779520"/>
-            <a:ext cx="2682240" cy="0"/>
-          </a:xfrm>
-          <a:prstGeom prst="line">
-            <a:avLst/>
-          </a:prstGeom>
-          <a:ln w="25400">
-            <a:solidFill>
-              <a:srgbClr val="8EDBD4"/>
-            </a:solidFill>
-            <a:headEnd type="none" w="med" len="med"/>
-            <a:tailEnd type="triangle" w="med" len="med"/>
-          </a:ln>
-          <a:effectLst/>
-        </p:spPr>
-      </p:cxnSp>
-      <p:sp>
-        <p:nvSpPr>
-          <p:cNvPr id="12" name="text11" descr="sci-ppt:C2-E06-011"/>
-          <p:cNvSpPr txBox="1"/>
-          <p:nvPr/>
-        </p:nvSpPr>
-        <p:spPr>
-          <a:xfrm>
-            <a:off x="4511040" y="4023360"/>
-            <a:ext cx="4267200" cy="340156"/>
-          </a:xfrm>
-          <a:prstGeom prst="rect">
-            <a:avLst/>
-          </a:prstGeom>
-          <a:noFill/>
-          <a:effectLst/>
-        </p:spPr>
-        <p:txBody>
-          <a:bodyPr wrap="none" lIns="27432" rIns="27432" tIns="18288" bIns="18288" anchor="ctr">
-            <a:spAutoFit/>
-          </a:bodyPr>
-          <a:lstStyle/>
-          <a:p>
-            <a:pPr algn="l">
-              <a:spcAft>
-                <a:spcPts val="0"/>
-              </a:spcAft>
-            </a:pPr>
-            <a:r>
-              <a:rPr sz="1728" b="0" i="0">
-                <a:solidFill>
-                  <a:srgbClr val="E7F0F3"/>
-                </a:solidFill>
-                <a:latin typeface="Arial"/>
-              </a:rPr>
-              <a:t>+z; thickness h_a</a:t>
-            </a:r>
-          </a:p>
-        </p:txBody>
-      </p:sp>
-      <p:sp>
-        <p:nvSpPr>
-          <p:cNvPr id="13" name="text12" descr="sci-ppt:C2-E06-012"/>
-          <p:cNvSpPr txBox="1"/>
-          <p:nvPr/>
-        </p:nvSpPr>
-        <p:spPr>
-          <a:xfrm>
-            <a:off x="365760" y="4974336"/>
-            <a:ext cx="5547360" cy="321259"/>
-          </a:xfrm>
-          <a:prstGeom prst="rect">
-            <a:avLst/>
-          </a:prstGeom>
-          <a:noFill/>
-          <a:effectLst/>
-        </p:spPr>
-        <p:txBody>
-          <a:bodyPr wrap="none" lIns="27432" rIns="27432" tIns="18288" bIns="18288" anchor="ctr">
-            <a:spAutoFit/>
-          </a:bodyPr>
-          <a:lstStyle/>
-          <a:p>
-            <a:pPr algn="l">
-              <a:spcAft>
-                <a:spcPts val="0"/>
-              </a:spcAft>
-            </a:pPr>
-            <a:r>
-              <a:rPr sz="1632" b="0" i="0">
-                <a:solidFill>
-                  <a:srgbClr val="E7F0F3"/>
-                </a:solidFill>
-                <a:latin typeface="Arial"/>
-              </a:rPr>
-              <a:t>h_a: slab thickness</a:t>
-            </a:r>
-          </a:p>
-        </p:txBody>
-      </p:sp>
-      <p:sp>
-        <p:nvSpPr>
-          <p:cNvPr id="14" name="text13" descr="sci-ppt:C2-E06-013"/>
-          <p:cNvSpPr txBox="1"/>
-          <p:nvPr/>
-        </p:nvSpPr>
-        <p:spPr>
-          <a:xfrm>
-            <a:off x="365760" y="5266944"/>
-            <a:ext cx="5547360" cy="321259"/>
-          </a:xfrm>
-          <a:prstGeom prst="rect">
-            <a:avLst/>
-          </a:prstGeom>
-          <a:noFill/>
-          <a:effectLst/>
-        </p:spPr>
-        <p:txBody>
-          <a:bodyPr wrap="none" lIns="27432" rIns="27432" tIns="18288" bIns="18288" anchor="ctr">
-            <a:spAutoFit/>
-          </a:bodyPr>
-          <a:lstStyle/>
-          <a:p>
-            <a:pPr algn="l">
-              <a:spcAft>
-                <a:spcPts val="0"/>
-              </a:spcAft>
-            </a:pPr>
-            <a:r>
-              <a:rPr sz="1632" b="0" i="0">
-                <a:solidFill>
-                  <a:srgbClr val="E7F0F3"/>
-                </a:solidFill>
-                <a:latin typeface="Arial"/>
-              </a:rPr>
-              <a:t>Ω_a, dV: absorbing volume</a:t>
-            </a:r>
-          </a:p>
-        </p:txBody>
-      </p:sp>
-      <p:sp>
-        <p:nvSpPr>
-          <p:cNvPr id="15" name="text14" descr="sci-ppt:C2-E06-014"/>
-          <p:cNvSpPr txBox="1"/>
-          <p:nvPr/>
-        </p:nvSpPr>
-        <p:spPr>
-          <a:xfrm>
-            <a:off x="365760" y="5559552"/>
-            <a:ext cx="5547360" cy="321259"/>
-          </a:xfrm>
-          <a:prstGeom prst="rect">
-            <a:avLst/>
-          </a:prstGeom>
-          <a:noFill/>
-          <a:effectLst/>
-        </p:spPr>
-        <p:txBody>
-          <a:bodyPr wrap="none" lIns="27432" rIns="27432" tIns="18288" bIns="18288" anchor="ctr">
-            <a:spAutoFit/>
-          </a:bodyPr>
-          <a:lstStyle/>
-          <a:p>
-            <a:pPr algn="l">
-              <a:spcAft>
-                <a:spcPts val="0"/>
-              </a:spcAft>
-            </a:pPr>
-            <a:r>
-              <a:rPr sz="1632" b="0" i="0">
-                <a:solidFill>
-                  <a:srgbClr val="E7F0F3"/>
-                </a:solidFill>
-                <a:latin typeface="Arial"/>
-              </a:rPr>
-              <a:t>μ_a, Q_abs: optical heating</a:t>
-            </a:r>
-          </a:p>
-        </p:txBody>
-      </p:sp>
-      <p:sp>
-        <p:nvSpPr>
-          <p:cNvPr id="16" name="text15" descr="sci-ppt:C2-E06-015"/>
-          <p:cNvSpPr txBox="1"/>
-          <p:nvPr/>
-        </p:nvSpPr>
-        <p:spPr>
-          <a:xfrm>
-            <a:off x="365760" y="5852160"/>
-            <a:ext cx="5547360" cy="321259"/>
-          </a:xfrm>
-          <a:prstGeom prst="rect">
-            <a:avLst/>
-          </a:prstGeom>
-          <a:noFill/>
-          <a:effectLst/>
-        </p:spPr>
-        <p:txBody>
-          <a:bodyPr wrap="none" lIns="27432" rIns="27432" tIns="18288" bIns="18288" anchor="ctr">
-            <a:spAutoFit/>
-          </a:bodyPr>
-          <a:lstStyle/>
-          <a:p>
-            <a:pPr algn="l">
-              <a:spcAft>
-                <a:spcPts val="0"/>
-              </a:spcAft>
-            </a:pPr>
-            <a:r>
-              <a:rPr sz="1632" b="0" i="0">
-                <a:solidFill>
-                  <a:srgbClr val="E7F0F3"/>
-                </a:solidFill>
-                <a:latin typeface="Arial"/>
-              </a:rPr>
-              <a:t>f_geo, E_L, E_abs: energy accounting</a:t>
-            </a:r>
-          </a:p>
-        </p:txBody>
-      </p:sp>
-      <p:sp>
-        <p:nvSpPr>
-          <p:cNvPr id="17" name="text16" descr="sci-ppt:C2-E06-016"/>
-          <p:cNvSpPr txBox="1"/>
-          <p:nvPr/>
-        </p:nvSpPr>
-        <p:spPr>
-          <a:xfrm>
-            <a:off x="6156960" y="4974336"/>
-            <a:ext cx="5547360" cy="321259"/>
-          </a:xfrm>
-          <a:prstGeom prst="rect">
-            <a:avLst/>
-          </a:prstGeom>
-          <a:noFill/>
-          <a:effectLst/>
-        </p:spPr>
-        <p:txBody>
-          <a:bodyPr wrap="none" lIns="27432" rIns="27432" tIns="18288" bIns="18288" anchor="ctr">
-            <a:spAutoFit/>
-          </a:bodyPr>
-          <a:lstStyle/>
-          <a:p>
-            <a:pPr algn="l">
-              <a:spcAft>
-                <a:spcPts val="0"/>
-              </a:spcAft>
-            </a:pPr>
-            <a:r>
-              <a:rPr sz="1632" b="0" i="0">
-                <a:solidFill>
-                  <a:srgbClr val="E7F0F3"/>
-                </a:solidFill>
-                <a:latin typeface="Arial"/>
-              </a:rPr>
-              <a:t>z: depth</a:t>
-            </a:r>
-          </a:p>
-        </p:txBody>
-      </p:sp>
-      <p:sp>
-        <p:nvSpPr>
-          <p:cNvPr id="18" name="text17" descr="sci-ppt:C2-E06-017"/>
-          <p:cNvSpPr txBox="1"/>
-          <p:nvPr/>
-        </p:nvSpPr>
-        <p:spPr>
-          <a:xfrm>
-            <a:off x="6156960" y="5266944"/>
-            <a:ext cx="5547360" cy="321259"/>
-          </a:xfrm>
-          <a:prstGeom prst="rect">
-            <a:avLst/>
-          </a:prstGeom>
-          <a:noFill/>
-          <a:effectLst/>
-        </p:spPr>
-        <p:txBody>
-          <a:bodyPr wrap="none" lIns="27432" rIns="27432" tIns="18288" bIns="18288" anchor="ctr">
-            <a:spAutoFit/>
-          </a:bodyPr>
-          <a:lstStyle/>
-          <a:p>
-            <a:pPr algn="l">
-              <a:spcAft>
-                <a:spcPts val="0"/>
-              </a:spcAft>
-            </a:pPr>
-            <a:r>
-              <a:rPr sz="1632" b="0" i="0">
-                <a:solidFill>
-                  <a:srgbClr val="E7F0F3"/>
-                </a:solidFill>
-                <a:latin typeface="Arial"/>
-              </a:rPr>
-              <a:t>I_in: light after reflection</a:t>
-            </a:r>
-          </a:p>
-        </p:txBody>
-      </p:sp>
-      <p:sp>
-        <p:nvSpPr>
-          <p:cNvPr id="19" name="text18" descr="sci-ppt:C2-E06-018"/>
-          <p:cNvSpPr txBox="1"/>
-          <p:nvPr/>
-        </p:nvSpPr>
-        <p:spPr>
-          <a:xfrm>
-            <a:off x="6156960" y="5559552"/>
-            <a:ext cx="5547360" cy="321259"/>
-          </a:xfrm>
-          <a:prstGeom prst="rect">
-            <a:avLst/>
-          </a:prstGeom>
-          <a:noFill/>
-          <a:effectLst/>
-        </p:spPr>
-        <p:txBody>
-          <a:bodyPr wrap="none" lIns="27432" rIns="27432" tIns="18288" bIns="18288" anchor="ctr">
-            <a:spAutoFit/>
-          </a:bodyPr>
-          <a:lstStyle/>
-          <a:p>
-            <a:pPr algn="l">
-              <a:spcAft>
-                <a:spcPts val="0"/>
-              </a:spcAft>
-            </a:pPr>
-            <a:r>
-              <a:rPr sz="1632" b="0" i="0">
-                <a:solidFill>
-                  <a:srgbClr val="E7F0F3"/>
-                </a:solidFill>
-                <a:latin typeface="Arial"/>
-              </a:rPr>
-              <a:t>λ, ℛ_λ, A_λ: wavelength and fractions</a:t>
-            </a:r>
-          </a:p>
-        </p:txBody>
-      </p:sp>
-      <p:sp>
-        <p:nvSpPr>
-          <p:cNvPr id="20" name="text19" descr="sci-ppt:C2-E06-019"/>
-          <p:cNvSpPr txBox="1"/>
-          <p:nvPr/>
-        </p:nvSpPr>
-        <p:spPr>
-          <a:xfrm>
-            <a:off x="6156960" y="5852160"/>
-            <a:ext cx="5547360" cy="321259"/>
-          </a:xfrm>
-          <a:prstGeom prst="rect">
-            <a:avLst/>
-          </a:prstGeom>
-          <a:noFill/>
-          <a:effectLst/>
-        </p:spPr>
-        <p:txBody>
-          <a:bodyPr wrap="none" lIns="27432" rIns="27432" tIns="18288" bIns="18288" anchor="ctr">
-            <a:spAutoFit/>
-          </a:bodyPr>
-          <a:lstStyle/>
-          <a:p>
-            <a:pPr algn="l">
-              <a:spcAft>
-                <a:spcPts val="0"/>
-              </a:spcAft>
-            </a:pPr>
-            <a:r>
-              <a:rPr sz="1632" b="0" i="0">
-                <a:solidFill>
-                  <a:srgbClr val="E7F0F3"/>
-                </a:solidFill>
-                <a:latin typeface="Arial"/>
-              </a:rPr>
-              <a:t>t: pulse integration</a:t>
-            </a:r>
-          </a:p>
-        </p:txBody>
-      </p:sp>
-      <p:sp>
-        <p:nvSpPr>
-          <p:cNvPr id="21" name="text20" descr="sci-ppt:C2-E06-020"/>
-          <p:cNvSpPr txBox="1"/>
-          <p:nvPr/>
-        </p:nvSpPr>
-        <p:spPr>
-          <a:xfrm>
-            <a:off x="365760" y="6339840"/>
-            <a:ext cx="11277600" cy="302361"/>
-          </a:xfrm>
-          <a:prstGeom prst="rect">
-            <a:avLst/>
-          </a:prstGeom>
-          <a:noFill/>
-          <a:effectLst/>
-        </p:spPr>
-        <p:txBody>
-          <a:bodyPr wrap="none" lIns="27432" rIns="27432" tIns="18288" bIns="18288" anchor="ctr">
-            <a:spAutoFit/>
-          </a:bodyPr>
-          <a:lstStyle/>
-          <a:p>
-            <a:pPr algn="l">
-              <a:spcAft>
-                <a:spcPts val="0"/>
-              </a:spcAft>
-            </a:pPr>
-            <a:r>
-              <a:rPr sz="1536" b="0" i="0">
+              <a:rPr sz="1000" b="0" i="0">
                 <a:solidFill>
                   <a:srgbClr val="B4C7D2"/>
                 </a:solidFill>
                 <a:latin typeface="Arial"/>
               </a:rPr>
-              <a:t>Reflection occurs before entry</a:t>
-            </a:r>
-          </a:p>
-        </p:txBody>
-      </p:sp>
-      <p:sp>
-        <p:nvSpPr>
-          <p:cNvPr id="22" name="text21" descr="sci-ppt:C2-E06-021"/>
-          <p:cNvSpPr txBox="1"/>
-          <p:nvPr/>
-        </p:nvSpPr>
-        <p:spPr>
-          <a:xfrm>
-            <a:off x="365760" y="6632448"/>
-            <a:ext cx="11277600" cy="302361"/>
-          </a:xfrm>
-          <a:prstGeom prst="rect">
-            <a:avLst/>
-          </a:prstGeom>
-          <a:noFill/>
-          <a:effectLst/>
-        </p:spPr>
-        <p:txBody>
-          <a:bodyPr wrap="none" lIns="27432" rIns="27432" tIns="18288" bIns="18288" anchor="ctr">
-            <a:spAutoFit/>
-          </a:bodyPr>
-          <a:lstStyle/>
-          <a:p>
-            <a:pPr algn="l">
-              <a:spcAft>
-                <a:spcPts val="0"/>
-              </a:spcAft>
-            </a:pPr>
-            <a:r>
-              <a:rPr sz="1536" b="0" i="0">
-                <a:solidFill>
-                  <a:srgbClr val="B4C7D2"/>
-                </a:solidFill>
-                <a:latin typeface="Arial"/>
-              </a:rPr>
-              <a:t>Integrate the source once; do not add equivalent boundary heating again</a:t>
+              <a:t>Energy balance of Eq. C2-E06, numbers as in Eq. C2-E31.</a:t>
             </a:r>
           </a:p>
         </p:txBody>
